--- a/courses/theory/slides/lec07-sat.pptx
+++ b/courses/theory/slides/lec07-sat.pptx
@@ -10474,7 +10474,11 @@
               <a:buNone/>
             </a:pPr>
             <a:r>
-              <a:rPr kumimoji="1" lang="en-US" altLang="zh-CN" dirty="0"/>
+              <a:rPr kumimoji="1" lang="en-US" altLang="zh-CN" dirty="0">
+                <a:solidFill>
+                  <a:schemeClr val="tx1"/>
+                </a:solidFill>
+              </a:rPr>
               <a:t>(~p1\/~p2) /\ (p2\/p4)</a:t>
             </a:r>
           </a:p>
@@ -10525,7 +10529,11 @@
               <a:buNone/>
             </a:pPr>
             <a:r>
-              <a:rPr kumimoji="1" lang="en-US" altLang="zh-CN" dirty="0"/>
+              <a:rPr kumimoji="1" lang="en-US" altLang="zh-CN" dirty="0">
+                <a:solidFill>
+                  <a:schemeClr val="tx1"/>
+                </a:solidFill>
+              </a:rPr>
               <a:t>(~T\/~p2) /\ (p2\/p4)</a:t>
             </a:r>
           </a:p>
@@ -10576,7 +10584,11 @@
               <a:buNone/>
             </a:pPr>
             <a:r>
-              <a:rPr kumimoji="1" lang="en-US" altLang="zh-CN" dirty="0"/>
+              <a:rPr kumimoji="1" lang="en-US" altLang="zh-CN" dirty="0">
+                <a:solidFill>
+                  <a:schemeClr val="tx1"/>
+                </a:solidFill>
+              </a:rPr>
               <a:t>(~F\/~p2) /\ (p2\/p4)</a:t>
             </a:r>
           </a:p>
@@ -10895,7 +10907,11 @@
               <a:buNone/>
             </a:pPr>
             <a:r>
-              <a:rPr kumimoji="1" lang="en-US" altLang="zh-CN" dirty="0"/>
+              <a:rPr kumimoji="1" lang="en-US" altLang="zh-CN" dirty="0">
+                <a:solidFill>
+                  <a:schemeClr val="tx1"/>
+                </a:solidFill>
+              </a:rPr>
               <a:t>(~p1\/~p2) /\ (p2\/p4)</a:t>
             </a:r>
           </a:p>
@@ -10946,7 +10962,11 @@
               <a:buNone/>
             </a:pPr>
             <a:r>
-              <a:rPr kumimoji="1" lang="en-US" altLang="zh-CN" dirty="0"/>
+              <a:rPr kumimoji="1" lang="en-US" altLang="zh-CN" dirty="0">
+                <a:solidFill>
+                  <a:schemeClr val="tx1"/>
+                </a:solidFill>
+              </a:rPr>
               <a:t>~p2 /\ (p2\/p4)</a:t>
             </a:r>
           </a:p>
@@ -10997,7 +11017,11 @@
               <a:buNone/>
             </a:pPr>
             <a:r>
-              <a:rPr kumimoji="1" lang="en-US" altLang="zh-CN" dirty="0"/>
+              <a:rPr kumimoji="1" lang="en-US" altLang="zh-CN" dirty="0">
+                <a:solidFill>
+                  <a:schemeClr val="tx1"/>
+                </a:solidFill>
+              </a:rPr>
               <a:t>p2\/p4</a:t>
             </a:r>
           </a:p>
@@ -11396,7 +11420,11 @@
               <a:buNone/>
             </a:pPr>
             <a:r>
-              <a:rPr kumimoji="1" lang="en-US" altLang="zh-CN" dirty="0"/>
+              <a:rPr kumimoji="1" lang="en-US" altLang="zh-CN" dirty="0">
+                <a:solidFill>
+                  <a:schemeClr val="tx1"/>
+                </a:solidFill>
+              </a:rPr>
               <a:t>(~p1\/~p2) /\ (p2\/p4)</a:t>
             </a:r>
           </a:p>
@@ -11447,7 +11475,11 @@
               <a:buNone/>
             </a:pPr>
             <a:r>
-              <a:rPr kumimoji="1" lang="en-US" altLang="zh-CN" dirty="0"/>
+              <a:rPr kumimoji="1" lang="en-US" altLang="zh-CN" dirty="0">
+                <a:solidFill>
+                  <a:schemeClr val="tx1"/>
+                </a:solidFill>
+              </a:rPr>
               <a:t>~F /\ (p2\/p4)</a:t>
             </a:r>
           </a:p>
@@ -11498,7 +11530,11 @@
               <a:buNone/>
             </a:pPr>
             <a:r>
-              <a:rPr kumimoji="1" lang="en-US" altLang="zh-CN" dirty="0"/>
+              <a:rPr kumimoji="1" lang="en-US" altLang="zh-CN" dirty="0">
+                <a:solidFill>
+                  <a:schemeClr val="tx1"/>
+                </a:solidFill>
+              </a:rPr>
               <a:t>p2\/p4</a:t>
             </a:r>
           </a:p>
@@ -11934,7 +11970,11 @@
               <a:buNone/>
             </a:pPr>
             <a:r>
-              <a:rPr kumimoji="1" lang="en-US" altLang="zh-CN" dirty="0"/>
+              <a:rPr kumimoji="1" lang="en-US" altLang="zh-CN" dirty="0">
+                <a:solidFill>
+                  <a:schemeClr val="tx1"/>
+                </a:solidFill>
+              </a:rPr>
               <a:t>(~p1\/~p2) /\ (p2\/p4)</a:t>
             </a:r>
           </a:p>
@@ -11985,7 +12025,11 @@
               <a:buNone/>
             </a:pPr>
             <a:r>
-              <a:rPr kumimoji="1" lang="en-US" altLang="zh-CN" dirty="0"/>
+              <a:rPr kumimoji="1" lang="en-US" altLang="zh-CN" dirty="0">
+                <a:solidFill>
+                  <a:schemeClr val="tx1"/>
+                </a:solidFill>
+              </a:rPr>
               <a:t>~F /\ (F \/p4)</a:t>
             </a:r>
           </a:p>
@@ -12036,7 +12080,11 @@
               <a:buNone/>
             </a:pPr>
             <a:r>
-              <a:rPr kumimoji="1" lang="en-US" altLang="zh-CN" dirty="0"/>
+              <a:rPr kumimoji="1" lang="en-US" altLang="zh-CN" dirty="0">
+                <a:solidFill>
+                  <a:schemeClr val="tx1"/>
+                </a:solidFill>
+              </a:rPr>
               <a:t>p2\/p4</a:t>
             </a:r>
           </a:p>
@@ -12472,7 +12520,11 @@
               <a:buNone/>
             </a:pPr>
             <a:r>
-              <a:rPr kumimoji="1" lang="en-US" altLang="zh-CN" dirty="0"/>
+              <a:rPr kumimoji="1" lang="en-US" altLang="zh-CN" dirty="0">
+                <a:solidFill>
+                  <a:schemeClr val="tx1"/>
+                </a:solidFill>
+              </a:rPr>
               <a:t>(~p1\/~p2) /\ (p2\/p4)</a:t>
             </a:r>
           </a:p>
@@ -12523,7 +12575,11 @@
               <a:buNone/>
             </a:pPr>
             <a:r>
-              <a:rPr kumimoji="1" lang="en-US" altLang="zh-CN" dirty="0"/>
+              <a:rPr kumimoji="1" lang="en-US" altLang="zh-CN" dirty="0">
+                <a:solidFill>
+                  <a:schemeClr val="tx1"/>
+                </a:solidFill>
+              </a:rPr>
               <a:t>p4</a:t>
             </a:r>
           </a:p>
@@ -12574,7 +12630,11 @@
               <a:buNone/>
             </a:pPr>
             <a:r>
-              <a:rPr kumimoji="1" lang="en-US" altLang="zh-CN" dirty="0"/>
+              <a:rPr kumimoji="1" lang="en-US" altLang="zh-CN" dirty="0">
+                <a:solidFill>
+                  <a:schemeClr val="tx1"/>
+                </a:solidFill>
+              </a:rPr>
               <a:t>p2\/p4</a:t>
             </a:r>
           </a:p>
@@ -13010,7 +13070,11 @@
               <a:buNone/>
             </a:pPr>
             <a:r>
-              <a:rPr kumimoji="1" lang="en-US" altLang="zh-CN" dirty="0"/>
+              <a:rPr kumimoji="1" lang="en-US" altLang="zh-CN" dirty="0">
+                <a:solidFill>
+                  <a:schemeClr val="tx1"/>
+                </a:solidFill>
+              </a:rPr>
               <a:t>(~p1\/~p2) /\ (p2\/p4)</a:t>
             </a:r>
           </a:p>
@@ -13061,7 +13125,11 @@
               <a:buNone/>
             </a:pPr>
             <a:r>
-              <a:rPr kumimoji="1" lang="en-US" altLang="zh-CN" dirty="0"/>
+              <a:rPr kumimoji="1" lang="en-US" altLang="zh-CN" dirty="0">
+                <a:solidFill>
+                  <a:schemeClr val="tx1"/>
+                </a:solidFill>
+              </a:rPr>
               <a:t>p4</a:t>
             </a:r>
           </a:p>
@@ -13112,7 +13180,11 @@
               <a:buNone/>
             </a:pPr>
             <a:r>
-              <a:rPr kumimoji="1" lang="en-US" altLang="zh-CN" dirty="0"/>
+              <a:rPr kumimoji="1" lang="en-US" altLang="zh-CN" dirty="0">
+                <a:solidFill>
+                  <a:schemeClr val="tx1"/>
+                </a:solidFill>
+              </a:rPr>
               <a:t>p2\/p4</a:t>
             </a:r>
           </a:p>
@@ -13584,7 +13656,11 @@
               <a:buNone/>
             </a:pPr>
             <a:r>
-              <a:rPr kumimoji="1" lang="en-US" altLang="zh-CN" dirty="0"/>
+              <a:rPr kumimoji="1" lang="en-US" altLang="zh-CN" dirty="0">
+                <a:solidFill>
+                  <a:schemeClr val="tx1"/>
+                </a:solidFill>
+              </a:rPr>
               <a:t>(~p1\/~p2) /\ (p2\/p4)</a:t>
             </a:r>
           </a:p>
@@ -13635,7 +13711,11 @@
               <a:buNone/>
             </a:pPr>
             <a:r>
-              <a:rPr kumimoji="1" lang="en-US" altLang="zh-CN" dirty="0"/>
+              <a:rPr kumimoji="1" lang="en-US" altLang="zh-CN" dirty="0">
+                <a:solidFill>
+                  <a:schemeClr val="tx1"/>
+                </a:solidFill>
+              </a:rPr>
               <a:t>T</a:t>
             </a:r>
           </a:p>
@@ -13686,7 +13766,11 @@
               <a:buNone/>
             </a:pPr>
             <a:r>
-              <a:rPr kumimoji="1" lang="en-US" altLang="zh-CN" dirty="0"/>
+              <a:rPr kumimoji="1" lang="en-US" altLang="zh-CN" dirty="0">
+                <a:solidFill>
+                  <a:schemeClr val="tx1"/>
+                </a:solidFill>
+              </a:rPr>
               <a:t>p2\/p4</a:t>
             </a:r>
           </a:p>
@@ -14860,8 +14944,8 @@
           </a:p>
         </p:txBody>
       </p:sp>
-      <mc:AlternateContent xmlns:mc="http://schemas.openxmlformats.org/markup-compatibility/2006" xmlns:a14="http://schemas.microsoft.com/office/drawing/2010/main">
-        <mc:Choice Requires="a14">
+      <mc:AlternateContent xmlns:mc="http://schemas.openxmlformats.org/markup-compatibility/2006">
+        <mc:Choice xmlns:a14="http://schemas.microsoft.com/office/drawing/2010/main" Requires="a14">
           <p:graphicFrame>
             <p:nvGraphicFramePr>
               <p:cNvPr id="4" name="表格 3">
@@ -14877,7 +14961,7 @@
               <p:nvPr>
                 <p:extLst>
                   <p:ext uri="{D42A27DB-BD31-4B8C-83A1-F6EECF244321}">
-                    <p14:modId xmlns:p14="http://schemas.microsoft.com/office/powerpoint/2010/main" val="1776643796"/>
+                    <p14:modId xmlns:p14="http://schemas.microsoft.com/office/powerpoint/2010/main" val="130779907"/>
                   </p:ext>
                 </p:extLst>
               </p:nvPr>
@@ -14922,10 +15006,18 @@
                         <a:lstStyle/>
                         <a:p>
                           <a:r>
-                            <a:rPr lang="en-US" altLang="zh-CN" dirty="0"/>
+                            <a:rPr lang="en-US" altLang="zh-CN" dirty="0">
+                              <a:solidFill>
+                                <a:schemeClr val="tx1"/>
+                              </a:solidFill>
+                            </a:rPr>
                             <a:t>P</a:t>
                           </a:r>
-                          <a:endParaRPr lang="zh-CN" altLang="en-US" dirty="0"/>
+                          <a:endParaRPr lang="zh-CN" altLang="en-US" dirty="0">
+                            <a:solidFill>
+                              <a:schemeClr val="tx1"/>
+                            </a:solidFill>
+                          </a:endParaRPr>
                         </a:p>
                       </a:txBody>
                       <a:tcPr/>
@@ -14953,10 +15045,18 @@
                             <a:defRPr/>
                           </a:pPr>
                           <a:r>
-                            <a:rPr lang="en-US" altLang="zh-CN" dirty="0"/>
+                            <a:rPr lang="en-US" altLang="zh-CN" dirty="0">
+                              <a:solidFill>
+                                <a:schemeClr val="tx1"/>
+                              </a:solidFill>
+                            </a:rPr>
                             <a:t>Q</a:t>
                           </a:r>
-                          <a:endParaRPr lang="zh-CN" altLang="en-US" dirty="0"/>
+                          <a:endParaRPr lang="zh-CN" altLang="en-US" dirty="0">
+                            <a:solidFill>
+                              <a:schemeClr val="tx1"/>
+                            </a:solidFill>
+                          </a:endParaRPr>
                         </a:p>
                       </a:txBody>
                       <a:tcPr/>
@@ -14988,7 +15088,7 @@
                               <m:r>
                                 <a:rPr lang="en-US" altLang="zh-CN" sz="1800" b="1" kern="1200" smtClean="0">
                                   <a:solidFill>
-                                    <a:schemeClr val="lt1"/>
+                                    <a:schemeClr val="tx1"/>
                                   </a:solidFill>
                                   <a:latin typeface="Cambria Math" panose="02040503050406030204" pitchFamily="18" charset="0"/>
                                   <a:ea typeface="+mn-ea"/>
@@ -15001,7 +15101,7 @@
                           <a:r>
                             <a:rPr lang="en-US" altLang="zh-CN" sz="1800" b="1" kern="1200" dirty="0">
                               <a:solidFill>
-                                <a:schemeClr val="lt1"/>
+                                <a:schemeClr val="tx1"/>
                               </a:solidFill>
                               <a:latin typeface="+mn-lt"/>
                               <a:ea typeface="+mn-ea"/>
@@ -15014,7 +15114,7 @@
                               <m:r>
                                 <a:rPr lang="en-US" altLang="zh-CN" sz="1800" b="1" kern="1200" dirty="0" smtClean="0">
                                   <a:solidFill>
-                                    <a:schemeClr val="lt1"/>
+                                    <a:schemeClr val="tx1"/>
                                   </a:solidFill>
                                   <a:latin typeface="Cambria Math" panose="02040503050406030204" pitchFamily="18" charset="0"/>
                                   <a:ea typeface="+mn-ea"/>
@@ -15026,7 +15126,7 @@
                           </a14:m>
                           <a:endParaRPr lang="zh-CN" altLang="en-US" sz="1800" b="1" kern="1200" dirty="0">
                             <a:solidFill>
-                              <a:schemeClr val="lt1"/>
+                              <a:schemeClr val="tx1"/>
                             </a:solidFill>
                             <a:latin typeface="+mn-lt"/>
                             <a:ea typeface="+mn-ea"/>
@@ -15251,7 +15351,7 @@
             </a:graphic>
           </p:graphicFrame>
         </mc:Choice>
-        <mc:Fallback xmlns="">
+        <mc:Fallback>
           <p:graphicFrame>
             <p:nvGraphicFramePr>
               <p:cNvPr id="4" name="表格 3">
@@ -15267,7 +15367,7 @@
               <p:nvPr>
                 <p:extLst>
                   <p:ext uri="{D42A27DB-BD31-4B8C-83A1-F6EECF244321}">
-                    <p14:modId xmlns:p14="http://schemas.microsoft.com/office/powerpoint/2010/main" val="1776643796"/>
+                    <p14:modId xmlns:p14="http://schemas.microsoft.com/office/powerpoint/2010/main" val="130779907"/>
                   </p:ext>
                 </p:extLst>
               </p:nvPr>
@@ -15312,10 +15412,18 @@
                         <a:lstStyle/>
                         <a:p>
                           <a:r>
-                            <a:rPr lang="en-US" altLang="zh-CN" dirty="0"/>
+                            <a:rPr lang="en-US" altLang="zh-CN" dirty="0">
+                              <a:solidFill>
+                                <a:schemeClr val="tx1"/>
+                              </a:solidFill>
+                            </a:rPr>
                             <a:t>P</a:t>
                           </a:r>
-                          <a:endParaRPr lang="zh-CN" altLang="en-US" dirty="0"/>
+                          <a:endParaRPr lang="zh-CN" altLang="en-US" dirty="0">
+                            <a:solidFill>
+                              <a:schemeClr val="tx1"/>
+                            </a:solidFill>
+                          </a:endParaRPr>
                         </a:p>
                       </a:txBody>
                       <a:tcPr/>
@@ -15343,10 +15451,18 @@
                             <a:defRPr/>
                           </a:pPr>
                           <a:r>
-                            <a:rPr lang="en-US" altLang="zh-CN" dirty="0"/>
+                            <a:rPr lang="en-US" altLang="zh-CN" dirty="0">
+                              <a:solidFill>
+                                <a:schemeClr val="tx1"/>
+                              </a:solidFill>
+                            </a:rPr>
                             <a:t>Q</a:t>
                           </a:r>
-                          <a:endParaRPr lang="zh-CN" altLang="en-US" dirty="0"/>
+                          <a:endParaRPr lang="zh-CN" altLang="en-US" dirty="0">
+                            <a:solidFill>
+                              <a:schemeClr val="tx1"/>
+                            </a:solidFill>
+                          </a:endParaRPr>
                         </a:p>
                       </a:txBody>
                       <a:tcPr/>
@@ -15363,7 +15479,7 @@
                         <a:blipFill>
                           <a:blip r:embed="rId2"/>
                           <a:stretch>
-                            <a:fillRect l="-201087" t="-10345" r="-2174" b="-427586"/>
+                            <a:fillRect l="-201087" t="-10345" r="-3261" b="-431034"/>
                           </a:stretch>
                         </a:blipFill>
                       </a:tcPr>
@@ -15795,17 +15911,29 @@
           <a:p>
             <a:pPr algn="ctr"/>
             <a:r>
-              <a:rPr kumimoji="1" lang="en-US" altLang="zh-CN" dirty="0"/>
+              <a:rPr kumimoji="1" lang="en-US" altLang="zh-CN" dirty="0">
+                <a:solidFill>
+                  <a:schemeClr val="tx1"/>
+                </a:solidFill>
+              </a:rPr>
               <a:t>SAT solver/</a:t>
             </a:r>
           </a:p>
           <a:p>
             <a:pPr algn="ctr"/>
             <a:r>
-              <a:rPr kumimoji="1" lang="en-US" altLang="zh-CN" dirty="0"/>
+              <a:rPr kumimoji="1" lang="en-US" altLang="zh-CN" dirty="0">
+                <a:solidFill>
+                  <a:schemeClr val="tx1"/>
+                </a:solidFill>
+              </a:rPr>
               <a:t>Theorem prover</a:t>
             </a:r>
-            <a:endParaRPr kumimoji="1" lang="zh-CN" altLang="en-US" dirty="0"/>
+            <a:endParaRPr kumimoji="1" lang="zh-CN" altLang="en-US" dirty="0">
+              <a:solidFill>
+                <a:schemeClr val="tx1"/>
+              </a:solidFill>
+            </a:endParaRPr>
           </a:p>
         </p:txBody>
       </p:sp>
@@ -17453,7 +17581,7 @@
             </a:r>
             <a:r>
               <a:rPr kumimoji="1" lang="en-US" altLang="zh-CN" dirty="0"/>
-              <a:t>{2,</a:t>
+              <a:t>S</a:t>
             </a:r>
             <a:r>
               <a:rPr kumimoji="1" lang="zh-CN" altLang="en-US" dirty="0"/>
@@ -17461,7 +17589,7 @@
             </a:r>
             <a:r>
               <a:rPr kumimoji="1" lang="en-US" altLang="zh-CN" dirty="0"/>
-              <a:t>3,</a:t>
+              <a:t>=</a:t>
             </a:r>
             <a:r>
               <a:rPr kumimoji="1" lang="zh-CN" altLang="en-US" dirty="0"/>
@@ -17469,7 +17597,7 @@
             </a:r>
             <a:r>
               <a:rPr kumimoji="1" lang="en-US" altLang="zh-CN" dirty="0"/>
-              <a:t>8,</a:t>
+              <a:t>{2,</a:t>
             </a:r>
             <a:r>
               <a:rPr kumimoji="1" lang="zh-CN" altLang="en-US" dirty="0"/>
@@ -17477,13 +17605,7 @@
             </a:r>
             <a:r>
               <a:rPr kumimoji="1" lang="en-US" altLang="zh-CN" dirty="0"/>
-              <a:t>-5}</a:t>
-            </a:r>
-          </a:p>
-          <a:p>
-            <a:r>
-              <a:rPr kumimoji="1" lang="en-US" altLang="zh-CN" dirty="0"/>
-              <a:t>the</a:t>
+              <a:t>3,</a:t>
             </a:r>
             <a:r>
               <a:rPr kumimoji="1" lang="zh-CN" altLang="en-US" dirty="0"/>
@@ -17491,7 +17613,45 @@
             </a:r>
             <a:r>
               <a:rPr kumimoji="1" lang="en-US" altLang="zh-CN" dirty="0"/>
+              <a:t>8,</a:t>
+            </a:r>
+            <a:r>
+              <a:rPr kumimoji="1" lang="zh-CN" altLang="en-US" dirty="0"/>
+              <a:t> </a:t>
+            </a:r>
+            <a:r>
+              <a:rPr kumimoji="1" lang="en-US" altLang="zh-CN" dirty="0"/>
+              <a:t>-5}</a:t>
+            </a:r>
+          </a:p>
+          <a:p>
+            <a:r>
+              <a:rPr kumimoji="1" lang="en-US" altLang="zh-CN" dirty="0"/>
+              <a:t>the</a:t>
+            </a:r>
+            <a:r>
+              <a:rPr kumimoji="1" lang="zh-CN" altLang="en-US" dirty="0"/>
+              <a:t> </a:t>
+            </a:r>
+            <a:r>
+              <a:rPr kumimoji="1" lang="en-US" altLang="zh-CN" dirty="0"/>
               <a:t>subset:</a:t>
+            </a:r>
+            <a:r>
+              <a:rPr kumimoji="1" lang="zh-CN" altLang="en-US" dirty="0"/>
+              <a:t> </a:t>
+            </a:r>
+            <a:r>
+              <a:rPr kumimoji="1" lang="en-US" altLang="zh-CN" dirty="0"/>
+              <a:t>T</a:t>
+            </a:r>
+            <a:r>
+              <a:rPr kumimoji="1" lang="zh-CN" altLang="en-US" dirty="0"/>
+              <a:t> </a:t>
+            </a:r>
+            <a:r>
+              <a:rPr kumimoji="1" lang="en-US" altLang="zh-CN" dirty="0"/>
+              <a:t>=</a:t>
             </a:r>
             <a:r>
               <a:rPr kumimoji="1" lang="zh-CN" altLang="en-US" dirty="0"/>
@@ -17564,7 +17724,15 @@
                   <a:srgbClr val="0432FF"/>
                 </a:solidFill>
               </a:rPr>
-              <a:t>x_i</a:t>
+              <a:t>x</a:t>
+            </a:r>
+            <a:r>
+              <a:rPr kumimoji="1" lang="en-US" altLang="zh-CN" baseline="-25000" dirty="0">
+                <a:solidFill>
+                  <a:srgbClr val="0432FF"/>
+                </a:solidFill>
+              </a:rPr>
+              <a:t>i</a:t>
             </a:r>
             <a:r>
               <a:rPr kumimoji="1" lang="en-US" altLang="zh-CN" dirty="0"/>
@@ -17640,31 +17808,47 @@
           <a:p>
             <a:r>
               <a:rPr kumimoji="1" lang="en-US" altLang="zh-CN" dirty="0"/>
-              <a:t>x_0</a:t>
+              <a:t>x</a:t>
+            </a:r>
+            <a:r>
+              <a:rPr kumimoji="1" lang="en-US" altLang="zh-CN" baseline="-25000" dirty="0"/>
+              <a:t>0</a:t>
             </a:r>
             <a:r>
               <a:rPr kumimoji="1" lang="zh-CN" altLang="en-US" dirty="0"/>
-              <a:t>  </a:t>
-            </a:r>
-            <a:r>
-              <a:rPr kumimoji="1" lang="en-US" altLang="zh-CN" dirty="0"/>
-              <a:t>x_1</a:t>
+              <a:t>     </a:t>
+            </a:r>
+            <a:r>
+              <a:rPr kumimoji="1" lang="en-US" altLang="zh-CN" dirty="0"/>
+              <a:t>x</a:t>
+            </a:r>
+            <a:r>
+              <a:rPr kumimoji="1" lang="en-US" altLang="zh-CN" baseline="-25000" dirty="0"/>
+              <a:t>1</a:t>
             </a:r>
             <a:r>
               <a:rPr kumimoji="1" lang="zh-CN" altLang="en-US" dirty="0"/>
-              <a:t>   </a:t>
-            </a:r>
-            <a:r>
-              <a:rPr kumimoji="1" lang="en-US" altLang="zh-CN" dirty="0"/>
-              <a:t>x_2</a:t>
+              <a:t>     </a:t>
+            </a:r>
+            <a:r>
+              <a:rPr kumimoji="1" lang="en-US" altLang="zh-CN" dirty="0"/>
+              <a:t>x</a:t>
+            </a:r>
+            <a:r>
+              <a:rPr kumimoji="1" lang="en-US" altLang="zh-CN" baseline="-25000" dirty="0"/>
+              <a:t>2</a:t>
             </a:r>
             <a:r>
               <a:rPr kumimoji="1" lang="zh-CN" altLang="en-US" dirty="0"/>
-              <a:t>   </a:t>
-            </a:r>
-            <a:r>
-              <a:rPr kumimoji="1" lang="en-US" altLang="zh-CN" dirty="0"/>
-              <a:t>x_3</a:t>
+              <a:t>      </a:t>
+            </a:r>
+            <a:r>
+              <a:rPr kumimoji="1" lang="en-US" altLang="zh-CN" dirty="0"/>
+              <a:t>x</a:t>
+            </a:r>
+            <a:r>
+              <a:rPr kumimoji="1" lang="en-US" altLang="zh-CN" baseline="-25000" dirty="0"/>
+              <a:t>3</a:t>
             </a:r>
           </a:p>
           <a:p>
@@ -17681,16 +17865,12 @@
               <a:t>3,</a:t>
             </a:r>
             <a:r>
-              <a:rPr kumimoji="1" lang="zh-CN" altLang="en-US"/>
+              <a:rPr kumimoji="1" lang="zh-CN" altLang="en-US" dirty="0"/>
               <a:t>     </a:t>
             </a:r>
             <a:r>
-              <a:rPr kumimoji="1" lang="en-US" altLang="zh-CN"/>
-              <a:t>8</a:t>
-            </a:r>
-            <a:r>
-              <a:rPr kumimoji="1" lang="en-US" altLang="zh-CN" dirty="0"/>
-              <a:t>,</a:t>
+              <a:rPr kumimoji="1" lang="en-US" altLang="zh-CN" dirty="0"/>
+              <a:t>8,</a:t>
             </a:r>
             <a:r>
               <a:rPr kumimoji="1" lang="zh-CN" altLang="en-US" dirty="0"/>
@@ -17736,15 +17916,15 @@
                   <a:srgbClr val="0432FF"/>
                 </a:solidFill>
               </a:rPr>
-              <a:t>(</a:t>
-            </a:r>
-            <a:r>
-              <a:rPr kumimoji="1" lang="en-US" altLang="zh-CN" dirty="0" err="1">
+              <a:t>(x</a:t>
+            </a:r>
+            <a:r>
+              <a:rPr kumimoji="1" lang="en-US" altLang="zh-CN" baseline="-25000" dirty="0">
                 <a:solidFill>
                   <a:srgbClr val="0432FF"/>
                 </a:solidFill>
               </a:rPr>
-              <a:t>x_i</a:t>
+              <a:t>i</a:t>
             </a:r>
             <a:r>
               <a:rPr kumimoji="1" lang="zh-CN" altLang="en-US" dirty="0">
@@ -17776,15 +17956,15 @@
                   <a:srgbClr val="0432FF"/>
                 </a:solidFill>
               </a:rPr>
-              <a:t>]) \/ (¬</a:t>
-            </a:r>
-            <a:r>
-              <a:rPr kumimoji="1" lang="en-US" altLang="zh-CN" dirty="0" err="1">
+              <a:t>]) \/ (¬x</a:t>
+            </a:r>
+            <a:r>
+              <a:rPr kumimoji="1" lang="en-US" altLang="zh-CN" baseline="-25000" dirty="0">
                 <a:solidFill>
                   <a:srgbClr val="0432FF"/>
                 </a:solidFill>
               </a:rPr>
-              <a:t>x_i</a:t>
+              <a:t>i</a:t>
             </a:r>
             <a:r>
               <a:rPr kumimoji="1" lang="zh-CN" altLang="en-US" dirty="0">
@@ -17816,7 +17996,23 @@
                   <a:srgbClr val="0432FF"/>
                 </a:solidFill>
               </a:rPr>
-              <a:t>If(x_i, S[</a:t>
+              <a:t>If(x</a:t>
+            </a:r>
+            <a:r>
+              <a:rPr kumimoji="1" lang="en-US" altLang="zh-CN" baseline="-25000" dirty="0">
+                <a:solidFill>
+                  <a:srgbClr val="0432FF"/>
+                </a:solidFill>
+              </a:rPr>
+              <a:t>i</a:t>
+            </a:r>
+            <a:r>
+              <a:rPr kumimoji="1" lang="en-US" altLang="zh-CN" dirty="0">
+                <a:solidFill>
+                  <a:srgbClr val="0432FF"/>
+                </a:solidFill>
+              </a:rPr>
+              <a:t>, S[</a:t>
             </a:r>
             <a:r>
               <a:rPr kumimoji="1" lang="en-US" altLang="zh-CN" dirty="0" err="1">
@@ -17889,7 +18085,23 @@
                   <a:srgbClr val="0432FF"/>
                 </a:solidFill>
               </a:rPr>
-              <a:t>If(x_0, S[0], 0) +…+ If(</a:t>
+              <a:t>If(x</a:t>
+            </a:r>
+            <a:r>
+              <a:rPr kumimoji="1" lang="en-US" altLang="zh-CN" baseline="-25000" dirty="0">
+                <a:solidFill>
+                  <a:srgbClr val="0432FF"/>
+                </a:solidFill>
+              </a:rPr>
+              <a:t>0</a:t>
+            </a:r>
+            <a:r>
+              <a:rPr kumimoji="1" lang="en-US" altLang="zh-CN" dirty="0">
+                <a:solidFill>
+                  <a:srgbClr val="0432FF"/>
+                </a:solidFill>
+              </a:rPr>
+              <a:t>, S[0], 0) +…+ If(</a:t>
             </a:r>
             <a:r>
               <a:rPr kumimoji="1" lang="en-US" altLang="zh-CN" dirty="0" err="1">
@@ -17897,7 +18109,15 @@
                   <a:srgbClr val="0432FF"/>
                 </a:solidFill>
               </a:rPr>
-              <a:t>x_n</a:t>
+              <a:t>x</a:t>
+            </a:r>
+            <a:r>
+              <a:rPr kumimoji="1" lang="en-US" altLang="zh-CN" baseline="-25000" dirty="0" err="1">
+                <a:solidFill>
+                  <a:srgbClr val="0432FF"/>
+                </a:solidFill>
+              </a:rPr>
+              <a:t>n</a:t>
             </a:r>
             <a:r>
               <a:rPr kumimoji="1" lang="en-US" altLang="zh-CN" dirty="0">
@@ -17937,7 +18157,23 @@
                   <a:srgbClr val="0432FF"/>
                 </a:solidFill>
               </a:rPr>
-              <a:t>Or(x_0, …, </a:t>
+              <a:t>Or(x</a:t>
+            </a:r>
+            <a:r>
+              <a:rPr kumimoji="1" lang="en-US" altLang="zh-CN" baseline="-25000" dirty="0">
+                <a:solidFill>
+                  <a:srgbClr val="0432FF"/>
+                </a:solidFill>
+              </a:rPr>
+              <a:t>0</a:t>
+            </a:r>
+            <a:r>
+              <a:rPr kumimoji="1" lang="en-US" altLang="zh-CN" dirty="0">
+                <a:solidFill>
+                  <a:srgbClr val="0432FF"/>
+                </a:solidFill>
+              </a:rPr>
+              <a:t>, …, </a:t>
             </a:r>
             <a:r>
               <a:rPr kumimoji="1" lang="en-US" altLang="zh-CN" dirty="0" err="1">
@@ -17945,7 +18181,15 @@
                   <a:srgbClr val="0432FF"/>
                 </a:solidFill>
               </a:rPr>
-              <a:t>x_n</a:t>
+              <a:t>x</a:t>
+            </a:r>
+            <a:r>
+              <a:rPr kumimoji="1" lang="en-US" altLang="zh-CN" baseline="-25000" dirty="0" err="1">
+                <a:solidFill>
+                  <a:srgbClr val="0432FF"/>
+                </a:solidFill>
+              </a:rPr>
+              <a:t>n</a:t>
             </a:r>
             <a:r>
               <a:rPr kumimoji="1" lang="en-US" altLang="zh-CN" dirty="0">
@@ -18767,12 +19011,20 @@
               <a:buAutoNum type="arabicPeriod"/>
             </a:pPr>
             <a:r>
-              <a:rPr kumimoji="1" lang="en-US" altLang="zh-CN" dirty="0" err="1">
+              <a:rPr kumimoji="1" lang="en-US" altLang="zh-CN" dirty="0">
                 <a:solidFill>
                   <a:srgbClr val="0432FF"/>
                 </a:solidFill>
               </a:rPr>
-              <a:t>x_i</a:t>
+              <a:t>x</a:t>
+            </a:r>
+            <a:r>
+              <a:rPr kumimoji="1" lang="en-US" altLang="zh-CN" baseline="-25000" dirty="0">
+                <a:solidFill>
+                  <a:srgbClr val="0432FF"/>
+                </a:solidFill>
+              </a:rPr>
+              <a:t>i</a:t>
             </a:r>
             <a:r>
               <a:rPr kumimoji="1" lang="en-US" altLang="zh-CN" dirty="0"/>
@@ -18887,15 +19139,15 @@
                   <a:srgbClr val="0432FF"/>
                 </a:solidFill>
               </a:rPr>
-              <a:t>(If(</a:t>
-            </a:r>
-            <a:r>
-              <a:rPr kumimoji="1" lang="en-US" altLang="zh-CN" dirty="0" err="1">
+              <a:t>(If(x</a:t>
+            </a:r>
+            <a:r>
+              <a:rPr kumimoji="1" lang="en-US" altLang="zh-CN" baseline="-25000" dirty="0">
                 <a:solidFill>
                   <a:srgbClr val="0432FF"/>
                 </a:solidFill>
               </a:rPr>
-              <a:t>x_i</a:t>
+              <a:t>i</a:t>
             </a:r>
             <a:r>
               <a:rPr kumimoji="1" lang="en-US" altLang="zh-CN" dirty="0">
@@ -18903,7 +19155,7 @@
                   <a:srgbClr val="0432FF"/>
                 </a:solidFill>
               </a:rPr>
-              <a:t>),</a:t>
+              <a:t>,</a:t>
             </a:r>
             <a:r>
               <a:rPr kumimoji="1" lang="zh-CN" altLang="en-US" dirty="0">
@@ -19050,7 +19302,7 @@
           <p:nvPr>
             <p:extLst>
               <p:ext uri="{D42A27DB-BD31-4B8C-83A1-F6EECF244321}">
-                <p14:modId xmlns:p14="http://schemas.microsoft.com/office/powerpoint/2010/main" val="1185324620"/>
+                <p14:modId xmlns:p14="http://schemas.microsoft.com/office/powerpoint/2010/main" val="3721830050"/>
               </p:ext>
             </p:extLst>
           </p:nvPr>
@@ -19112,10 +19364,26 @@
                     <a:lstStyle/>
                     <a:p>
                       <a:r>
-                        <a:rPr lang="en-US" altLang="zh-CN" dirty="0"/>
-                        <a:t>t1</a:t>
+                        <a:rPr lang="en-US" altLang="zh-CN" dirty="0">
+                          <a:solidFill>
+                            <a:schemeClr val="tx1"/>
+                          </a:solidFill>
+                        </a:rPr>
+                        <a:t>t</a:t>
                       </a:r>
-                      <a:endParaRPr lang="zh-CN" altLang="en-US" dirty="0"/>
+                      <a:r>
+                        <a:rPr lang="en-US" altLang="zh-CN" baseline="-25000" dirty="0">
+                          <a:solidFill>
+                            <a:schemeClr val="tx1"/>
+                          </a:solidFill>
+                        </a:rPr>
+                        <a:t>1</a:t>
+                      </a:r>
+                      <a:endParaRPr lang="zh-CN" altLang="en-US" baseline="-25000" dirty="0">
+                        <a:solidFill>
+                          <a:schemeClr val="tx1"/>
+                        </a:solidFill>
+                      </a:endParaRPr>
                     </a:p>
                   </a:txBody>
                   <a:tcPr/>
@@ -19126,10 +19394,18 @@
                     <a:lstStyle/>
                     <a:p>
                       <a:r>
-                        <a:rPr lang="en-US" altLang="zh-CN" dirty="0"/>
+                        <a:rPr lang="en-US" altLang="zh-CN" dirty="0">
+                          <a:solidFill>
+                            <a:schemeClr val="tx1"/>
+                          </a:solidFill>
+                        </a:rPr>
                         <a:t>…</a:t>
                       </a:r>
-                      <a:endParaRPr lang="zh-CN" altLang="en-US" dirty="0"/>
+                      <a:endParaRPr lang="zh-CN" altLang="en-US" dirty="0">
+                        <a:solidFill>
+                          <a:schemeClr val="tx1"/>
+                        </a:solidFill>
+                      </a:endParaRPr>
                     </a:p>
                   </a:txBody>
                   <a:tcPr/>
@@ -19140,10 +19416,26 @@
                     <a:lstStyle/>
                     <a:p>
                       <a:r>
-                        <a:rPr lang="en-US" altLang="zh-CN" dirty="0" err="1"/>
-                        <a:t>tn</a:t>
+                        <a:rPr lang="en-US" altLang="zh-CN" dirty="0" err="1">
+                          <a:solidFill>
+                            <a:schemeClr val="tx1"/>
+                          </a:solidFill>
+                        </a:rPr>
+                        <a:t>t</a:t>
                       </a:r>
-                      <a:endParaRPr lang="zh-CN" altLang="en-US" dirty="0"/>
+                      <a:r>
+                        <a:rPr lang="en-US" altLang="zh-CN" baseline="-25000" dirty="0" err="1">
+                          <a:solidFill>
+                            <a:schemeClr val="tx1"/>
+                          </a:solidFill>
+                        </a:rPr>
+                        <a:t>n</a:t>
+                      </a:r>
+                      <a:endParaRPr lang="zh-CN" altLang="en-US" baseline="-25000" dirty="0">
+                        <a:solidFill>
+                          <a:schemeClr val="tx1"/>
+                        </a:solidFill>
+                      </a:endParaRPr>
                     </a:p>
                   </a:txBody>
                   <a:tcPr/>
@@ -19176,9 +19468,13 @@
                     <a:p>
                       <a:r>
                         <a:rPr lang="en-US" altLang="zh-CN" dirty="0"/>
-                        <a:t>v1</a:t>
+                        <a:t>v</a:t>
                       </a:r>
-                      <a:endParaRPr lang="zh-CN" altLang="en-US" dirty="0"/>
+                      <a:r>
+                        <a:rPr lang="en-US" altLang="zh-CN" baseline="-25000" dirty="0"/>
+                        <a:t>1</a:t>
+                      </a:r>
+                      <a:endParaRPr lang="zh-CN" altLang="en-US" baseline="-25000" dirty="0"/>
                     </a:p>
                   </a:txBody>
                   <a:tcPr/>
@@ -19204,9 +19500,13 @@
                     <a:p>
                       <a:r>
                         <a:rPr lang="en-US" altLang="zh-CN" dirty="0" err="1"/>
-                        <a:t>vn</a:t>
+                        <a:t>v</a:t>
                       </a:r>
-                      <a:endParaRPr lang="zh-CN" altLang="en-US" dirty="0"/>
+                      <a:r>
+                        <a:rPr lang="en-US" altLang="zh-CN" baseline="-25000" dirty="0" err="1"/>
+                        <a:t>n</a:t>
+                      </a:r>
+                      <a:endParaRPr lang="zh-CN" altLang="en-US" baseline="-25000" dirty="0"/>
                     </a:p>
                   </a:txBody>
                   <a:tcPr/>
@@ -19239,9 +19539,13 @@
                     <a:p>
                       <a:r>
                         <a:rPr lang="en-US" altLang="zh-CN" dirty="0"/>
-                        <a:t>w1</a:t>
+                        <a:t>w</a:t>
                       </a:r>
-                      <a:endParaRPr lang="zh-CN" altLang="en-US" dirty="0"/>
+                      <a:r>
+                        <a:rPr lang="en-US" altLang="zh-CN" baseline="-25000" dirty="0"/>
+                        <a:t>1</a:t>
+                      </a:r>
+                      <a:endParaRPr lang="zh-CN" altLang="en-US" baseline="-25000" dirty="0"/>
                     </a:p>
                   </a:txBody>
                   <a:tcPr/>
@@ -19267,9 +19571,13 @@
                     <a:p>
                       <a:r>
                         <a:rPr lang="en-US" altLang="zh-CN" dirty="0" err="1"/>
-                        <a:t>wn</a:t>
+                        <a:t>w</a:t>
                       </a:r>
-                      <a:endParaRPr lang="zh-CN" altLang="en-US" dirty="0"/>
+                      <a:r>
+                        <a:rPr lang="en-US" altLang="zh-CN" baseline="-25000" dirty="0" err="1"/>
+                        <a:t>n</a:t>
+                      </a:r>
+                      <a:endParaRPr lang="zh-CN" altLang="en-US" baseline="-25000" dirty="0"/>
                     </a:p>
                   </a:txBody>
                   <a:tcPr/>
@@ -19553,7 +19861,7 @@
             <p:spPr>
               <a:xfrm>
                 <a:off x="304800" y="1905000"/>
-                <a:ext cx="5257800" cy="5061578"/>
+                <a:ext cx="5257800" cy="4230582"/>
               </a:xfrm>
               <a:prstGeom prst="rect">
                 <a:avLst/>
@@ -19578,7 +19886,7 @@
                       <a:srgbClr val="0432FF"/>
                     </a:solidFill>
                   </a:rPr>
-                  <a:t>bool</a:t>
+                  <a:t>Bool</a:t>
                 </a:r>
                 <a:r>
                   <a:rPr kumimoji="1" lang="zh-CN" altLang="en-US" dirty="0">
@@ -19623,7 +19931,9 @@
                           </m:mc>
                         </m:mcs>
                         <m:ctrlPr>
-                          <a:rPr kumimoji="1" lang="en-US" altLang="zh-CN"/>
+                          <a:rPr kumimoji="1" lang="en-US" altLang="zh-CN" i="1">
+                            <a:latin typeface="Cambria Math" panose="02040503050406030204" pitchFamily="18" charset="0"/>
+                          </a:rPr>
                         </m:ctrlPr>
                       </m:mPr>
                       <m:mr>
@@ -19632,26 +19942,49 @@
                             <m:rPr>
                               <m:brk m:alnAt="7"/>
                             </m:rPr>
-                            <a:rPr kumimoji="1" lang="en-US" altLang="zh-CN"/>
+                            <a:rPr kumimoji="1" lang="zh-CN" altLang="en-US" b="0" i="0" smtClean="0">
+                              <a:latin typeface="Cambria Math" panose="02040503050406030204" pitchFamily="18" charset="0"/>
+                            </a:rPr>
+                            <m:t> </m:t>
+                          </m:r>
+                          <m:r>
+                            <m:rPr>
+                              <m:brk m:alnAt="7"/>
+                            </m:rPr>
+                            <a:rPr kumimoji="1" lang="en-US" altLang="zh-CN">
+                              <a:latin typeface="Cambria Math" panose="02040503050406030204" pitchFamily="18" charset="0"/>
+                            </a:rPr>
                             <m:t>{</m:t>
                           </m:r>
                           <m:r>
                             <m:rPr>
                               <m:sty m:val="p"/>
                             </m:rPr>
-                            <a:rPr kumimoji="1" lang="en-US" altLang="zh-CN"/>
+                            <a:rPr kumimoji="1" lang="en-US" altLang="zh-CN">
+                              <a:latin typeface="Cambria Math" panose="02040503050406030204" pitchFamily="18" charset="0"/>
+                            </a:rPr>
                             <m:t>true</m:t>
                           </m:r>
                           <m:r>
-                            <a:rPr kumimoji="1" lang="en-US" altLang="zh-CN"/>
+                            <a:rPr kumimoji="1" lang="en-US" altLang="zh-CN">
+                              <a:latin typeface="Cambria Math" panose="02040503050406030204" pitchFamily="18" charset="0"/>
+                            </a:rPr>
                             <m:t>,</m:t>
                           </m:r>
                           <m:r>
                             <m:rPr>
                               <m:brk m:alnAt="7"/>
                             </m:rPr>
-                            <a:rPr kumimoji="1" lang="zh-CN" altLang="en-US"/>
-                            <m:t>  </m:t>
+                            <a:rPr kumimoji="1" lang="zh-CN" altLang="en-US">
+                              <a:latin typeface="Cambria Math" panose="02040503050406030204" pitchFamily="18" charset="0"/>
+                            </a:rPr>
+                            <m:t> </m:t>
+                          </m:r>
+                          <m:r>
+                            <a:rPr kumimoji="1" lang="zh-CN" altLang="en-US">
+                              <a:latin typeface="Cambria Math" panose="02040503050406030204" pitchFamily="18" charset="0"/>
+                            </a:rPr>
+                            <m:t> </m:t>
                           </m:r>
                           <m:r>
                             <m:rPr>
@@ -19660,23 +19993,27 @@
                             <a:rPr kumimoji="1" lang="zh-CN" altLang="en-US" b="0" i="0" smtClean="0">
                               <a:latin typeface="Cambria Math" panose="02040503050406030204" pitchFamily="18" charset="0"/>
                             </a:rPr>
-                            <m:t>  </m:t>
+                            <m:t> </m:t>
+                          </m:r>
+                          <m:r>
+                            <a:rPr kumimoji="1" lang="zh-CN" altLang="en-US" b="0" i="0" smtClean="0">
+                              <a:latin typeface="Cambria Math" panose="02040503050406030204" pitchFamily="18" charset="0"/>
+                            </a:rPr>
+                            <m:t> </m:t>
                           </m:r>
                           <m:r>
                             <m:rPr>
                               <m:sty m:val="p"/>
-                              <m:brk m:alnAt="7"/>
                             </m:rPr>
-                            <a:rPr kumimoji="1" lang="en-US" altLang="zh-CN" b="0" i="0" smtClean="0">
+                            <a:rPr kumimoji="1" lang="en-US" altLang="zh-CN" i="1">
                               <a:latin typeface="Cambria Math" panose="02040503050406030204" pitchFamily="18" charset="0"/>
                             </a:rPr>
-                            <m:t>if</m:t>
+                            <m:t>place</m:t>
                           </m:r>
                           <m:r>
-                            <m:rPr>
-                              <m:brk m:alnAt="7"/>
-                            </m:rPr>
-                            <a:rPr kumimoji="1" lang="zh-CN" altLang="en-US"/>
+                            <a:rPr kumimoji="1" lang="zh-CN" altLang="en-US" b="0" i="1" smtClean="0">
+                              <a:latin typeface="Cambria Math" panose="02040503050406030204" pitchFamily="18" charset="0"/>
+                            </a:rPr>
                             <m:t> </m:t>
                           </m:r>
                           <m:r>
@@ -19684,14 +20021,18 @@
                               <m:sty m:val="p"/>
                               <m:brk m:alnAt="7"/>
                             </m:rPr>
-                            <a:rPr kumimoji="1" lang="en-US" altLang="zh-CN"/>
-                            <m:t>there</m:t>
+                            <a:rPr kumimoji="1" lang="en-US" altLang="zh-CN">
+                              <a:latin typeface="Cambria Math" panose="02040503050406030204" pitchFamily="18" charset="0"/>
+                            </a:rPr>
+                            <m:t>a</m:t>
                           </m:r>
                           <m:r>
                             <m:rPr>
                               <m:brk m:alnAt="7"/>
                             </m:rPr>
-                            <a:rPr kumimoji="1" lang="zh-CN" altLang="en-US"/>
+                            <a:rPr kumimoji="1" lang="zh-CN" altLang="en-US">
+                              <a:latin typeface="Cambria Math" panose="02040503050406030204" pitchFamily="18" charset="0"/>
+                            </a:rPr>
                             <m:t> </m:t>
                           </m:r>
                           <m:r>
@@ -19699,41 +20040,39 @@
                               <m:sty m:val="p"/>
                               <m:brk m:alnAt="7"/>
                             </m:rPr>
-                            <a:rPr kumimoji="1" lang="en-US" altLang="zh-CN"/>
-                            <m:t>is</m:t>
+                            <a:rPr kumimoji="1" lang="en-US" altLang="zh-CN">
+                              <a:latin typeface="Cambria Math" panose="02040503050406030204" pitchFamily="18" charset="0"/>
+                            </a:rPr>
+                            <m:t>q</m:t>
                           </m:r>
                           <m:r>
                             <m:rPr>
-                              <m:brk m:alnAt="7"/>
+                              <m:sty m:val="p"/>
                             </m:rPr>
-                            <a:rPr kumimoji="1" lang="zh-CN" altLang="en-US"/>
+                            <a:rPr kumimoji="1" lang="en-US" altLang="zh-CN">
+                              <a:latin typeface="Cambria Math" panose="02040503050406030204" pitchFamily="18" charset="0"/>
+                            </a:rPr>
+                            <m:t>ueen</m:t>
+                          </m:r>
+                          <m:r>
+                            <a:rPr kumimoji="1" lang="zh-CN" altLang="en-US" b="0" i="0" smtClean="0">
+                              <a:latin typeface="Cambria Math" panose="02040503050406030204" pitchFamily="18" charset="0"/>
+                            </a:rPr>
                             <m:t> </m:t>
                           </m:r>
                           <m:r>
                             <m:rPr>
                               <m:sty m:val="p"/>
-                              <m:brk m:alnAt="7"/>
                             </m:rPr>
-                            <a:rPr kumimoji="1" lang="en-US" altLang="zh-CN"/>
-                            <m:t>a</m:t>
+                            <a:rPr kumimoji="1" lang="en-US" altLang="zh-CN" i="1">
+                              <a:latin typeface="Cambria Math" panose="02040503050406030204" pitchFamily="18" charset="0"/>
+                            </a:rPr>
+                            <m:t>here</m:t>
                           </m:r>
                           <m:r>
-                            <m:rPr>
-                              <m:brk m:alnAt="7"/>
-                            </m:rPr>
-                            <a:rPr kumimoji="1" lang="zh-CN" altLang="en-US"/>
-                            <m:t> </m:t>
-                          </m:r>
-                          <m:r>
-                            <m:rPr>
-                              <m:sty m:val="p"/>
-                              <m:brk m:alnAt="7"/>
-                            </m:rPr>
-                            <a:rPr kumimoji="1" lang="en-US" altLang="zh-CN"/>
-                            <m:t>queen</m:t>
-                          </m:r>
-                          <m:r>
-                            <a:rPr kumimoji="1" lang="en-US" altLang="zh-CN"/>
+                            <a:rPr kumimoji="1" lang="en-US" altLang="zh-CN">
+                              <a:latin typeface="Cambria Math" panose="02040503050406030204" pitchFamily="18" charset="0"/>
+                            </a:rPr>
                             <m:t>;</m:t>
                           </m:r>
                         </m:e>
@@ -19741,22 +20080,30 @@
                       <m:mr>
                         <m:e>
                           <m:r>
-                            <a:rPr kumimoji="1" lang="en-US" altLang="zh-CN"/>
+                            <a:rPr kumimoji="1" lang="en-US" altLang="zh-CN">
+                              <a:latin typeface="Cambria Math" panose="02040503050406030204" pitchFamily="18" charset="0"/>
+                            </a:rPr>
                             <m:t>{</m:t>
                           </m:r>
                           <m:r>
                             <m:rPr>
                               <m:sty m:val="p"/>
                             </m:rPr>
-                            <a:rPr kumimoji="1" lang="en-US" altLang="zh-CN"/>
+                            <a:rPr kumimoji="1" lang="en-US" altLang="zh-CN">
+                              <a:latin typeface="Cambria Math" panose="02040503050406030204" pitchFamily="18" charset="0"/>
+                            </a:rPr>
                             <m:t>false</m:t>
                           </m:r>
                           <m:r>
-                            <a:rPr kumimoji="1" lang="en-US" altLang="zh-CN"/>
+                            <a:rPr kumimoji="1" lang="en-US" altLang="zh-CN">
+                              <a:latin typeface="Cambria Math" panose="02040503050406030204" pitchFamily="18" charset="0"/>
+                            </a:rPr>
                             <m:t>,</m:t>
                           </m:r>
                           <m:r>
-                            <a:rPr kumimoji="1" lang="zh-CN" altLang="en-US"/>
+                            <a:rPr kumimoji="1" lang="zh-CN" altLang="en-US">
+                              <a:latin typeface="Cambria Math" panose="02040503050406030204" pitchFamily="18" charset="0"/>
+                            </a:rPr>
                             <m:t>      </m:t>
                           </m:r>
                           <m:r>
@@ -19766,18 +20113,24 @@
                             <m:t>  </m:t>
                           </m:r>
                           <m:r>
-                            <a:rPr kumimoji="1" lang="zh-CN" altLang="en-US"/>
+                            <a:rPr kumimoji="1" lang="zh-CN" altLang="en-US">
+                              <a:latin typeface="Cambria Math" panose="02040503050406030204" pitchFamily="18" charset="0"/>
+                            </a:rPr>
                             <m:t>          </m:t>
                           </m:r>
                           <m:r>
                             <m:rPr>
                               <m:sty m:val="p"/>
                             </m:rPr>
-                            <a:rPr kumimoji="1" lang="en-US" altLang="zh-CN"/>
+                            <a:rPr kumimoji="1" lang="en-US" altLang="zh-CN">
+                              <a:latin typeface="Cambria Math" panose="02040503050406030204" pitchFamily="18" charset="0"/>
+                            </a:rPr>
                             <m:t>otherwise</m:t>
                           </m:r>
                           <m:r>
-                            <a:rPr kumimoji="1" lang="en-US" altLang="zh-CN"/>
+                            <a:rPr kumimoji="1" lang="en-US" altLang="zh-CN">
+                              <a:latin typeface="Cambria Math" panose="02040503050406030204" pitchFamily="18" charset="0"/>
+                            </a:rPr>
                             <m:t>.</m:t>
                           </m:r>
                         </m:e>
@@ -19786,147 +20139,6 @@
                   </m:oMath>
                 </a14:m>
                 <a:endParaRPr kumimoji="1" lang="en-US" altLang="zh-CN" dirty="0"/>
-              </a:p>
-              <a:p>
-                <a:r>
-                  <a:rPr kumimoji="1" lang="en-US" altLang="zh-CN" dirty="0"/>
-                  <a:t>This</a:t>
-                </a:r>
-                <a:r>
-                  <a:rPr kumimoji="1" lang="zh-CN" altLang="en-US" dirty="0"/>
-                  <a:t> </a:t>
-                </a:r>
-                <a:r>
-                  <a:rPr kumimoji="1" lang="en-US" altLang="zh-CN" dirty="0"/>
-                  <a:t>is</a:t>
-                </a:r>
-                <a:r>
-                  <a:rPr kumimoji="1" lang="zh-CN" altLang="en-US" dirty="0"/>
-                  <a:t> </a:t>
-                </a:r>
-                <a:r>
-                  <a:rPr kumimoji="1" lang="en-US" altLang="zh-CN" dirty="0"/>
-                  <a:t>equivalent</a:t>
-                </a:r>
-                <a:r>
-                  <a:rPr kumimoji="1" lang="zh-CN" altLang="en-US" dirty="0"/>
-                  <a:t> </a:t>
-                </a:r>
-                <a:r>
-                  <a:rPr kumimoji="1" lang="en-US" altLang="zh-CN" dirty="0"/>
-                  <a:t>to:</a:t>
-                </a:r>
-              </a:p>
-              <a:p>
-                <a:r>
-                  <a:rPr kumimoji="1" lang="en-US" altLang="zh-CN" dirty="0">
-                    <a:solidFill>
-                      <a:srgbClr val="0432FF"/>
-                    </a:solidFill>
-                  </a:rPr>
-                  <a:t>If(board[</a:t>
-                </a:r>
-                <a:r>
-                  <a:rPr kumimoji="1" lang="en-US" altLang="zh-CN" dirty="0" err="1">
-                    <a:solidFill>
-                      <a:srgbClr val="0432FF"/>
-                    </a:solidFill>
-                  </a:rPr>
-                  <a:t>i</a:t>
-                </a:r>
-                <a:r>
-                  <a:rPr kumimoji="1" lang="en-US" altLang="zh-CN" dirty="0">
-                    <a:solidFill>
-                      <a:srgbClr val="0432FF"/>
-                    </a:solidFill>
-                  </a:rPr>
-                  <a:t>][j],</a:t>
-                </a:r>
-                <a:r>
-                  <a:rPr kumimoji="1" lang="zh-CN" altLang="en-US" dirty="0">
-                    <a:solidFill>
-                      <a:srgbClr val="0432FF"/>
-                    </a:solidFill>
-                  </a:rPr>
-                  <a:t> </a:t>
-                </a:r>
-                <a:r>
-                  <a:rPr kumimoji="1" lang="en-US" altLang="zh-CN" dirty="0">
-                    <a:solidFill>
-                      <a:srgbClr val="0432FF"/>
-                    </a:solidFill>
-                  </a:rPr>
-                  <a:t>1,</a:t>
-                </a:r>
-                <a:r>
-                  <a:rPr kumimoji="1" lang="zh-CN" altLang="en-US" dirty="0">
-                    <a:solidFill>
-                      <a:srgbClr val="0432FF"/>
-                    </a:solidFill>
-                  </a:rPr>
-                  <a:t> </a:t>
-                </a:r>
-                <a:r>
-                  <a:rPr kumimoji="1" lang="en-US" altLang="zh-CN" dirty="0">
-                    <a:solidFill>
-                      <a:srgbClr val="0432FF"/>
-                    </a:solidFill>
-                  </a:rPr>
-                  <a:t>0)</a:t>
-                </a:r>
-              </a:p>
-              <a:p>
-                <a:r>
-                  <a:rPr kumimoji="1" lang="en-US" altLang="zh-CN" dirty="0">
-                    <a:sym typeface="Wingdings" pitchFamily="2" charset="2"/>
-                  </a:rPr>
-                  <a:t>write</a:t>
-                </a:r>
-                <a:r>
-                  <a:rPr kumimoji="1" lang="zh-CN" altLang="en-US" dirty="0">
-                    <a:sym typeface="Wingdings" pitchFamily="2" charset="2"/>
-                  </a:rPr>
-                  <a:t> </a:t>
-                </a:r>
-                <a:r>
-                  <a:rPr kumimoji="1" lang="en-US" altLang="zh-CN" dirty="0">
-                    <a:sym typeface="Wingdings" pitchFamily="2" charset="2"/>
-                  </a:rPr>
-                  <a:t>as</a:t>
-                </a:r>
-                <a:r>
-                  <a:rPr kumimoji="1" lang="zh-CN" altLang="en-US" dirty="0">
-                    <a:sym typeface="Wingdings" pitchFamily="2" charset="2"/>
-                  </a:rPr>
-                  <a:t> </a:t>
-                </a:r>
-                <a:r>
-                  <a:rPr kumimoji="1" lang="en-US" altLang="zh-CN" dirty="0">
-                    <a:solidFill>
-                      <a:srgbClr val="0432FF"/>
-                    </a:solidFill>
-                    <a:sym typeface="Wingdings" pitchFamily="2" charset="2"/>
-                  </a:rPr>
-                  <a:t>e[</a:t>
-                </a:r>
-                <a:r>
-                  <a:rPr kumimoji="1" lang="en-US" altLang="zh-CN" dirty="0" err="1">
-                    <a:solidFill>
-                      <a:srgbClr val="0432FF"/>
-                    </a:solidFill>
-                    <a:sym typeface="Wingdings" pitchFamily="2" charset="2"/>
-                  </a:rPr>
-                  <a:t>i</a:t>
-                </a:r>
-                <a:r>
-                  <a:rPr kumimoji="1" lang="en-US" altLang="zh-CN" dirty="0">
-                    <a:solidFill>
-                      <a:srgbClr val="0432FF"/>
-                    </a:solidFill>
-                    <a:sym typeface="Wingdings" pitchFamily="2" charset="2"/>
-                  </a:rPr>
-                  <a:t>][j]</a:t>
-                </a:r>
               </a:p>
               <a:p>
                 <a:endParaRPr kumimoji="1" lang="en-US" altLang="zh-CN" dirty="0">
@@ -19946,8 +20158,12 @@
                   <a:buAutoNum type="arabicPeriod"/>
                 </a:pPr>
                 <a:r>
+                  <a:rPr kumimoji="1" lang="en-US" altLang="zh-CN"/>
+                  <a:t>Each </a:t>
+                </a:r>
+                <a:r>
                   <a:rPr kumimoji="1" lang="en-US" altLang="zh-CN" dirty="0"/>
-                  <a:t>Every row has </a:t>
+                  <a:t>row has </a:t>
                 </a:r>
                 <a:r>
                   <a:rPr kumimoji="1" lang="en-US" altLang="zh-CN" dirty="0">
@@ -19964,20 +20180,12 @@
               </a:p>
               <a:p>
                 <a:r>
-                  <a:rPr kumimoji="1" lang="zh-CN" altLang="en-US" dirty="0">
-                    <a:solidFill>
-                      <a:srgbClr val="0432FF"/>
-                    </a:solidFill>
-                  </a:rPr>
-                  <a:t>∑</a:t>
-                </a:r>
-                <a:r>
                   <a:rPr kumimoji="1" lang="en-US" altLang="zh-CN" dirty="0">
                     <a:solidFill>
                       <a:srgbClr val="0432FF"/>
                     </a:solidFill>
                   </a:rPr>
-                  <a:t>(e[0][0],</a:t>
+                  <a:t>Exactly(e[0][0],</a:t>
                 </a:r>
                 <a:r>
                   <a:rPr kumimoji="1" lang="zh-CN" altLang="en-US" dirty="0">
@@ -20025,25 +20233,17 @@
                       <a:srgbClr val="0432FF"/>
                     </a:solidFill>
                   </a:rPr>
-                  <a:t>e[0][3])=1 </a:t>
+                  <a:t>e[0][3]) </a:t>
                 </a:r>
               </a:p>
               <a:p>
-                <a:r>
-                  <a:rPr kumimoji="1" lang="zh-CN" altLang="en-US" dirty="0">
-                    <a:solidFill>
-                      <a:srgbClr val="0432FF"/>
-                    </a:solidFill>
-                  </a:rPr>
-                  <a:t>∑</a:t>
-                </a:r>
                 <a:r>
                   <a:rPr kumimoji="1" lang="en-US" altLang="zh-CN" dirty="0">
                     <a:solidFill>
                       <a:srgbClr val="0432FF"/>
                     </a:solidFill>
                   </a:rPr>
-                  <a:t>(e[1][0],</a:t>
+                  <a:t>Exactly(e[1][0],</a:t>
                 </a:r>
                 <a:r>
                   <a:rPr kumimoji="1" lang="zh-CN" altLang="en-US" dirty="0">
@@ -20091,26 +20291,18 @@
                       <a:srgbClr val="0432FF"/>
                     </a:solidFill>
                   </a:rPr>
-                  <a:t>e[1][3])=1 </a:t>
+                  <a:t>e[1][3])</a:t>
                 </a:r>
                 <a:endParaRPr kumimoji="1" lang="en-US" altLang="zh-CN" dirty="0"/>
               </a:p>
               <a:p>
-                <a:r>
-                  <a:rPr kumimoji="1" lang="zh-CN" altLang="en-US" dirty="0">
-                    <a:solidFill>
-                      <a:srgbClr val="0432FF"/>
-                    </a:solidFill>
-                  </a:rPr>
-                  <a:t>∑</a:t>
-                </a:r>
                 <a:r>
                   <a:rPr kumimoji="1" lang="en-US" altLang="zh-CN" dirty="0">
                     <a:solidFill>
                       <a:srgbClr val="0432FF"/>
                     </a:solidFill>
                   </a:rPr>
-                  <a:t>(e[2][0],</a:t>
+                  <a:t>Exactly(e[2][0],</a:t>
                 </a:r>
                 <a:r>
                   <a:rPr kumimoji="1" lang="zh-CN" altLang="en-US" dirty="0">
@@ -20158,25 +20350,17 @@
                       <a:srgbClr val="0432FF"/>
                     </a:solidFill>
                   </a:rPr>
-                  <a:t>e[2][3])=1</a:t>
+                  <a:t>e[2][3])</a:t>
                 </a:r>
               </a:p>
               <a:p>
-                <a:r>
-                  <a:rPr kumimoji="1" lang="zh-CN" altLang="en-US" dirty="0">
-                    <a:solidFill>
-                      <a:srgbClr val="0432FF"/>
-                    </a:solidFill>
-                  </a:rPr>
-                  <a:t>∑</a:t>
-                </a:r>
                 <a:r>
                   <a:rPr kumimoji="1" lang="en-US" altLang="zh-CN" dirty="0">
                     <a:solidFill>
                       <a:srgbClr val="0432FF"/>
                     </a:solidFill>
                   </a:rPr>
-                  <a:t>(e[3][0],</a:t>
+                  <a:t>Exactly(e[3][0],</a:t>
                 </a:r>
                 <a:r>
                   <a:rPr kumimoji="1" lang="zh-CN" altLang="en-US" dirty="0">
@@ -20224,7 +20408,7 @@
                       <a:srgbClr val="0432FF"/>
                     </a:solidFill>
                   </a:rPr>
-                  <a:t>e[3][3])=1  </a:t>
+                  <a:t>e[3][3])  </a:t>
                 </a:r>
               </a:p>
               <a:p>
@@ -20296,7 +20480,7 @@
             <p:spPr>
               <a:xfrm>
                 <a:off x="304800" y="1905000"/>
-                <a:ext cx="5257800" cy="5061578"/>
+                <a:ext cx="5257800" cy="4230582"/>
               </a:xfrm>
               <a:prstGeom prst="rect">
                 <a:avLst/>
@@ -20304,7 +20488,7 @@
               <a:blipFill>
                 <a:blip r:embed="rId2"/>
                 <a:stretch>
-                  <a:fillRect l="-964" t="-752" b="-1003"/>
+                  <a:fillRect l="-964" t="-901" b="-1502"/>
                 </a:stretch>
               </a:blipFill>
             </p:spPr>
@@ -20418,8 +20602,8 @@
           </a:p>
         </p:txBody>
       </p:sp>
-      <mc:AlternateContent xmlns:mc="http://schemas.openxmlformats.org/markup-compatibility/2006">
-        <mc:Choice xmlns:a14="http://schemas.microsoft.com/office/drawing/2010/main" Requires="a14">
+      <mc:AlternateContent xmlns:mc="http://schemas.openxmlformats.org/markup-compatibility/2006" xmlns:a14="http://schemas.microsoft.com/office/drawing/2010/main">
+        <mc:Choice Requires="a14">
           <p:sp>
             <p:nvSpPr>
               <p:cNvPr id="3" name="内容占位符 2">
@@ -20558,7 +20742,7 @@
             </p:txBody>
           </p:sp>
         </mc:Choice>
-        <mc:Fallback>
+        <mc:Fallback xmlns="">
           <p:sp>
             <p:nvSpPr>
               <p:cNvPr id="3" name="内容占位符 2">
@@ -20881,8 +21065,8 @@
           </a:p>
         </p:txBody>
       </p:sp>
-      <mc:AlternateContent xmlns:mc="http://schemas.openxmlformats.org/markup-compatibility/2006" xmlns:a14="http://schemas.microsoft.com/office/drawing/2010/main">
-        <mc:Choice Requires="a14">
+      <mc:AlternateContent xmlns:mc="http://schemas.openxmlformats.org/markup-compatibility/2006">
+        <mc:Choice xmlns:a14="http://schemas.microsoft.com/office/drawing/2010/main" Requires="a14">
           <p:graphicFrame>
             <p:nvGraphicFramePr>
               <p:cNvPr id="4" name="表格 3">
@@ -20898,7 +21082,7 @@
               <p:nvPr>
                 <p:extLst>
                   <p:ext uri="{D42A27DB-BD31-4B8C-83A1-F6EECF244321}">
-                    <p14:modId xmlns:p14="http://schemas.microsoft.com/office/powerpoint/2010/main" val="4223877176"/>
+                    <p14:modId xmlns:p14="http://schemas.microsoft.com/office/powerpoint/2010/main" val="3370997733"/>
                   </p:ext>
                 </p:extLst>
               </p:nvPr>
@@ -20950,10 +21134,18 @@
                         <a:lstStyle/>
                         <a:p>
                           <a:r>
-                            <a:rPr lang="en-US" altLang="zh-CN" dirty="0"/>
+                            <a:rPr lang="en-US" altLang="zh-CN" dirty="0">
+                              <a:solidFill>
+                                <a:schemeClr val="tx1"/>
+                              </a:solidFill>
+                            </a:rPr>
                             <a:t>P</a:t>
                           </a:r>
-                          <a:endParaRPr lang="zh-CN" altLang="en-US" dirty="0"/>
+                          <a:endParaRPr lang="zh-CN" altLang="en-US" dirty="0">
+                            <a:solidFill>
+                              <a:schemeClr val="tx1"/>
+                            </a:solidFill>
+                          </a:endParaRPr>
                         </a:p>
                       </a:txBody>
                       <a:tcPr/>
@@ -20981,10 +21173,18 @@
                             <a:defRPr/>
                           </a:pPr>
                           <a:r>
-                            <a:rPr lang="en-US" altLang="zh-CN" dirty="0"/>
+                            <a:rPr lang="en-US" altLang="zh-CN" dirty="0">
+                              <a:solidFill>
+                                <a:schemeClr val="tx1"/>
+                              </a:solidFill>
+                            </a:rPr>
                             <a:t>Q</a:t>
                           </a:r>
-                          <a:endParaRPr lang="zh-CN" altLang="en-US" dirty="0"/>
+                          <a:endParaRPr lang="zh-CN" altLang="en-US" dirty="0">
+                            <a:solidFill>
+                              <a:schemeClr val="tx1"/>
+                            </a:solidFill>
+                          </a:endParaRPr>
                         </a:p>
                       </a:txBody>
                       <a:tcPr/>
@@ -21016,7 +21216,7 @@
                               <m:r>
                                 <a:rPr lang="en-US" altLang="zh-CN" sz="1800" b="1" kern="1200" smtClean="0">
                                   <a:solidFill>
-                                    <a:schemeClr val="lt1"/>
+                                    <a:schemeClr val="tx1"/>
                                   </a:solidFill>
                                   <a:latin typeface="Cambria Math" panose="02040503050406030204" pitchFamily="18" charset="0"/>
                                   <a:ea typeface="+mn-ea"/>
@@ -21029,7 +21229,7 @@
                           <a:r>
                             <a:rPr lang="en-US" altLang="zh-CN" sz="1800" b="1" kern="1200" dirty="0">
                               <a:solidFill>
-                                <a:schemeClr val="lt1"/>
+                                <a:schemeClr val="tx1"/>
                               </a:solidFill>
                               <a:latin typeface="+mn-lt"/>
                               <a:ea typeface="+mn-ea"/>
@@ -21042,7 +21242,7 @@
                               <m:r>
                                 <a:rPr lang="en-US" altLang="zh-CN" sz="1800" b="1" kern="1200" dirty="0" smtClean="0">
                                   <a:solidFill>
-                                    <a:schemeClr val="lt1"/>
+                                    <a:schemeClr val="tx1"/>
                                   </a:solidFill>
                                   <a:latin typeface="Cambria Math" panose="02040503050406030204" pitchFamily="18" charset="0"/>
                                   <a:ea typeface="+mn-ea"/>
@@ -21054,7 +21254,7 @@
                           </a14:m>
                           <a:endParaRPr lang="zh-CN" altLang="en-US" sz="1800" b="1" kern="1200" dirty="0">
                             <a:solidFill>
-                              <a:schemeClr val="lt1"/>
+                              <a:schemeClr val="tx1"/>
                             </a:solidFill>
                             <a:latin typeface="+mn-lt"/>
                             <a:ea typeface="+mn-ea"/>
@@ -21089,7 +21289,7 @@
                           <a:r>
                             <a:rPr lang="en-US" altLang="zh-CN" sz="1800" b="1" kern="1200" dirty="0">
                               <a:solidFill>
-                                <a:schemeClr val="lt1"/>
+                                <a:schemeClr val="tx1"/>
                               </a:solidFill>
                               <a:latin typeface="+mn-lt"/>
                               <a:ea typeface="+mn-ea"/>
@@ -21099,7 +21299,7 @@
                           </a:r>
                           <a:endParaRPr lang="zh-CN" altLang="en-US" sz="1800" b="1" kern="1200" dirty="0">
                             <a:solidFill>
-                              <a:schemeClr val="lt1"/>
+                              <a:schemeClr val="tx1"/>
                             </a:solidFill>
                             <a:latin typeface="+mn-lt"/>
                             <a:ea typeface="+mn-ea"/>
@@ -21388,7 +21588,7 @@
             </a:graphic>
           </p:graphicFrame>
         </mc:Choice>
-        <mc:Fallback xmlns="">
+        <mc:Fallback>
           <p:graphicFrame>
             <p:nvGraphicFramePr>
               <p:cNvPr id="4" name="表格 3">
@@ -21404,7 +21604,7 @@
               <p:nvPr>
                 <p:extLst>
                   <p:ext uri="{D42A27DB-BD31-4B8C-83A1-F6EECF244321}">
-                    <p14:modId xmlns:p14="http://schemas.microsoft.com/office/powerpoint/2010/main" val="4223877176"/>
+                    <p14:modId xmlns:p14="http://schemas.microsoft.com/office/powerpoint/2010/main" val="3370997733"/>
                   </p:ext>
                 </p:extLst>
               </p:nvPr>
@@ -21456,10 +21656,18 @@
                         <a:lstStyle/>
                         <a:p>
                           <a:r>
-                            <a:rPr lang="en-US" altLang="zh-CN" dirty="0"/>
+                            <a:rPr lang="en-US" altLang="zh-CN" dirty="0">
+                              <a:solidFill>
+                                <a:schemeClr val="tx1"/>
+                              </a:solidFill>
+                            </a:rPr>
                             <a:t>P</a:t>
                           </a:r>
-                          <a:endParaRPr lang="zh-CN" altLang="en-US" dirty="0"/>
+                          <a:endParaRPr lang="zh-CN" altLang="en-US" dirty="0">
+                            <a:solidFill>
+                              <a:schemeClr val="tx1"/>
+                            </a:solidFill>
+                          </a:endParaRPr>
                         </a:p>
                       </a:txBody>
                       <a:tcPr/>
@@ -21487,10 +21695,18 @@
                             <a:defRPr/>
                           </a:pPr>
                           <a:r>
-                            <a:rPr lang="en-US" altLang="zh-CN" dirty="0"/>
+                            <a:rPr lang="en-US" altLang="zh-CN" dirty="0">
+                              <a:solidFill>
+                                <a:schemeClr val="tx1"/>
+                              </a:solidFill>
+                            </a:rPr>
                             <a:t>Q</a:t>
                           </a:r>
-                          <a:endParaRPr lang="zh-CN" altLang="en-US" dirty="0"/>
+                          <a:endParaRPr lang="zh-CN" altLang="en-US" dirty="0">
+                            <a:solidFill>
+                              <a:schemeClr val="tx1"/>
+                            </a:solidFill>
+                          </a:endParaRPr>
                         </a:p>
                       </a:txBody>
                       <a:tcPr/>
@@ -21507,7 +21723,7 @@
                         <a:blipFill>
                           <a:blip r:embed="rId2"/>
                           <a:stretch>
-                            <a:fillRect l="-201190" t="-10345" r="-102381" b="-427586"/>
+                            <a:fillRect l="-201190" t="-10345" r="-103571" b="-431034"/>
                           </a:stretch>
                         </a:blipFill>
                       </a:tcPr>
@@ -21537,7 +21753,7 @@
                           <a:r>
                             <a:rPr lang="en-US" altLang="zh-CN" sz="1800" b="1" kern="1200" dirty="0">
                               <a:solidFill>
-                                <a:schemeClr val="lt1"/>
+                                <a:schemeClr val="tx1"/>
                               </a:solidFill>
                               <a:latin typeface="+mn-lt"/>
                               <a:ea typeface="+mn-ea"/>
@@ -21547,7 +21763,7 @@
                           </a:r>
                           <a:endParaRPr lang="zh-CN" altLang="en-US" sz="1800" b="1" kern="1200" dirty="0">
                             <a:solidFill>
-                              <a:schemeClr val="lt1"/>
+                              <a:schemeClr val="tx1"/>
                             </a:solidFill>
                             <a:latin typeface="+mn-lt"/>
                             <a:ea typeface="+mn-ea"/>
@@ -22438,8 +22654,8 @@
           </p:sp>
         </mc:Fallback>
       </mc:AlternateContent>
-      <mc:AlternateContent xmlns:mc="http://schemas.openxmlformats.org/markup-compatibility/2006" xmlns:a14="http://schemas.microsoft.com/office/drawing/2010/main">
-        <mc:Choice Requires="a14">
+      <mc:AlternateContent xmlns:mc="http://schemas.openxmlformats.org/markup-compatibility/2006">
+        <mc:Choice xmlns:a14="http://schemas.microsoft.com/office/drawing/2010/main" Requires="a14">
           <p:graphicFrame>
             <p:nvGraphicFramePr>
               <p:cNvPr id="4" name="表格 3">
@@ -22455,7 +22671,7 @@
               <p:nvPr>
                 <p:extLst>
                   <p:ext uri="{D42A27DB-BD31-4B8C-83A1-F6EECF244321}">
-                    <p14:modId xmlns:p14="http://schemas.microsoft.com/office/powerpoint/2010/main" val="1630122730"/>
+                    <p14:modId xmlns:p14="http://schemas.microsoft.com/office/powerpoint/2010/main" val="943578058"/>
                   </p:ext>
                 </p:extLst>
               </p:nvPr>
@@ -22500,10 +22716,18 @@
                         <a:lstStyle/>
                         <a:p>
                           <a:r>
-                            <a:rPr lang="en-US" altLang="zh-CN" dirty="0"/>
+                            <a:rPr lang="en-US" altLang="zh-CN" dirty="0">
+                              <a:solidFill>
+                                <a:schemeClr val="tx1"/>
+                              </a:solidFill>
+                            </a:rPr>
                             <a:t>P</a:t>
                           </a:r>
-                          <a:endParaRPr lang="zh-CN" altLang="en-US" dirty="0"/>
+                          <a:endParaRPr lang="zh-CN" altLang="en-US" dirty="0">
+                            <a:solidFill>
+                              <a:schemeClr val="tx1"/>
+                            </a:solidFill>
+                          </a:endParaRPr>
                         </a:p>
                       </a:txBody>
                       <a:tcPr/>
@@ -22531,10 +22755,18 @@
                             <a:defRPr/>
                           </a:pPr>
                           <a:r>
-                            <a:rPr lang="en-US" altLang="zh-CN" dirty="0"/>
+                            <a:rPr lang="en-US" altLang="zh-CN" dirty="0">
+                              <a:solidFill>
+                                <a:schemeClr val="tx1"/>
+                              </a:solidFill>
+                            </a:rPr>
                             <a:t>Q</a:t>
                           </a:r>
-                          <a:endParaRPr lang="zh-CN" altLang="en-US" dirty="0"/>
+                          <a:endParaRPr lang="zh-CN" altLang="en-US" dirty="0">
+                            <a:solidFill>
+                              <a:schemeClr val="tx1"/>
+                            </a:solidFill>
+                          </a:endParaRPr>
                         </a:p>
                       </a:txBody>
                       <a:tcPr/>
@@ -22566,7 +22798,7 @@
                               <m:r>
                                 <a:rPr lang="en-US" altLang="zh-CN" sz="1800" b="1" kern="1200" smtClean="0">
                                   <a:solidFill>
-                                    <a:schemeClr val="lt1"/>
+                                    <a:schemeClr val="tx1"/>
                                   </a:solidFill>
                                   <a:latin typeface="Cambria Math" panose="02040503050406030204" pitchFamily="18" charset="0"/>
                                   <a:ea typeface="+mn-ea"/>
@@ -22579,7 +22811,7 @@
                           <a:r>
                             <a:rPr lang="en-US" altLang="zh-CN" sz="1800" b="1" kern="1200" dirty="0">
                               <a:solidFill>
-                                <a:schemeClr val="lt1"/>
+                                <a:schemeClr val="tx1"/>
                               </a:solidFill>
                               <a:latin typeface="+mn-lt"/>
                               <a:ea typeface="+mn-ea"/>
@@ -22592,7 +22824,7 @@
                               <m:r>
                                 <a:rPr lang="en-US" altLang="zh-CN" sz="1800" b="1" kern="1200" dirty="0" smtClean="0">
                                   <a:solidFill>
-                                    <a:schemeClr val="lt1"/>
+                                    <a:schemeClr val="tx1"/>
                                   </a:solidFill>
                                   <a:latin typeface="Cambria Math" panose="02040503050406030204" pitchFamily="18" charset="0"/>
                                   <a:ea typeface="+mn-ea"/>
@@ -22604,7 +22836,7 @@
                           </a14:m>
                           <a:endParaRPr lang="zh-CN" altLang="en-US" sz="1800" b="1" kern="1200" dirty="0">
                             <a:solidFill>
-                              <a:schemeClr val="lt1"/>
+                              <a:schemeClr val="tx1"/>
                             </a:solidFill>
                             <a:latin typeface="+mn-lt"/>
                             <a:ea typeface="+mn-ea"/>
@@ -22829,7 +23061,7 @@
             </a:graphic>
           </p:graphicFrame>
         </mc:Choice>
-        <mc:Fallback xmlns="">
+        <mc:Fallback>
           <p:graphicFrame>
             <p:nvGraphicFramePr>
               <p:cNvPr id="4" name="表格 3">
@@ -22845,7 +23077,7 @@
               <p:nvPr>
                 <p:extLst>
                   <p:ext uri="{D42A27DB-BD31-4B8C-83A1-F6EECF244321}">
-                    <p14:modId xmlns:p14="http://schemas.microsoft.com/office/powerpoint/2010/main" val="1630122730"/>
+                    <p14:modId xmlns:p14="http://schemas.microsoft.com/office/powerpoint/2010/main" val="943578058"/>
                   </p:ext>
                 </p:extLst>
               </p:nvPr>
@@ -22890,10 +23122,18 @@
                         <a:lstStyle/>
                         <a:p>
                           <a:r>
-                            <a:rPr lang="en-US" altLang="zh-CN" dirty="0"/>
+                            <a:rPr lang="en-US" altLang="zh-CN" dirty="0">
+                              <a:solidFill>
+                                <a:schemeClr val="tx1"/>
+                              </a:solidFill>
+                            </a:rPr>
                             <a:t>P</a:t>
                           </a:r>
-                          <a:endParaRPr lang="zh-CN" altLang="en-US" dirty="0"/>
+                          <a:endParaRPr lang="zh-CN" altLang="en-US" dirty="0">
+                            <a:solidFill>
+                              <a:schemeClr val="tx1"/>
+                            </a:solidFill>
+                          </a:endParaRPr>
                         </a:p>
                       </a:txBody>
                       <a:tcPr/>
@@ -22921,10 +23161,18 @@
                             <a:defRPr/>
                           </a:pPr>
                           <a:r>
-                            <a:rPr lang="en-US" altLang="zh-CN" dirty="0"/>
+                            <a:rPr lang="en-US" altLang="zh-CN" dirty="0">
+                              <a:solidFill>
+                                <a:schemeClr val="tx1"/>
+                              </a:solidFill>
+                            </a:rPr>
                             <a:t>Q</a:t>
                           </a:r>
-                          <a:endParaRPr lang="zh-CN" altLang="en-US" dirty="0"/>
+                          <a:endParaRPr lang="zh-CN" altLang="en-US" dirty="0">
+                            <a:solidFill>
+                              <a:schemeClr val="tx1"/>
+                            </a:solidFill>
+                          </a:endParaRPr>
                         </a:p>
                       </a:txBody>
                       <a:tcPr/>
@@ -22941,7 +23189,7 @@
                         <a:blipFill>
                           <a:blip r:embed="rId3"/>
                           <a:stretch>
-                            <a:fillRect l="-201087" t="-6897" r="-2174" b="-427586"/>
+                            <a:fillRect l="-201087" t="-6897" r="-3261" b="-431034"/>
                           </a:stretch>
                         </a:blipFill>
                       </a:tcPr>
